--- a/writing/decks/01-ratchet.pptx
+++ b/writing/decks/01-ratchet.pptx
@@ -3178,7 +3178,7 @@
                 </a:solidFill>
                 <a:latin typeface="Consolas"/>
               </a:rPr>
-              <a:t>RATCHET · PART 1 OF 4</a:t>
+              <a:t>RATCHET · PART 1 OF 5</a:t>
             </a:r>
           </a:p>
         </p:txBody>
@@ -3290,7 +3290,7 @@
                 </a:solidFill>
                 <a:latin typeface="Calibri"/>
               </a:rPr>
-              <a:t>Part 1 of 4 — the light, orienting piece. Three deep dives follow: the architecture and model fleet, the craft of writing specs precise enough for small models, and a full account of the recent burn-in.</a:t>
+              <a:t>Part 1 of 5 — the light, orienting piece. Four deep dives follow: the architecture and model fleet, the wire-level mechanics of talking to it over Ollama, the craft of writing specs precise enough for small models, and a full account of the recent burn-in.</a:t>
             </a:r>
           </a:p>
         </p:txBody>
@@ -3436,6 +3436,50 @@
         <p:spPr>
           <a:xfrm>
             <a:off x="1828799" y="6263640"/>
+            <a:ext cx="146304" cy="146304"/>
+          </a:xfrm>
+          <a:prstGeom prst="ellipse">
+            <a:avLst/>
+          </a:prstGeom>
+          <a:solidFill>
+            <a:srgbClr val="3A3E44"/>
+          </a:solidFill>
+          <a:ln>
+            <a:noFill/>
+          </a:ln>
+          <a:effectLst/>
+        </p:spPr>
+        <p:style>
+          <a:lnRef idx="1">
+            <a:schemeClr val="accent1"/>
+          </a:lnRef>
+          <a:fillRef idx="3">
+            <a:schemeClr val="accent1"/>
+          </a:fillRef>
+          <a:effectRef idx="2">
+            <a:schemeClr val="accent1"/>
+          </a:effectRef>
+          <a:fontRef idx="minor">
+            <a:schemeClr val="lt1"/>
+          </a:fontRef>
+        </p:style>
+        <p:txBody>
+          <a:bodyPr rtlCol="0" anchor="ctr"/>
+          <a:lstStyle/>
+          <a:p>
+            <a:pPr algn="ctr"/>
+          </a:p>
+        </p:txBody>
+      </p:sp>
+      <p:sp>
+        <p:nvSpPr>
+          <p:cNvPr id="11" name="Oval 10"/>
+          <p:cNvSpPr/>
+          <p:nvPr/>
+        </p:nvSpPr>
+        <p:spPr>
+          <a:xfrm>
+            <a:off x="2148839" y="6263640"/>
             <a:ext cx="146304" cy="146304"/>
           </a:xfrm>
           <a:prstGeom prst="ellipse">
@@ -3833,7 +3877,7 @@
                 </a:solidFill>
                 <a:latin typeface="Consolas"/>
               </a:rPr>
-              <a:t>RATCHET · PART 1/4</a:t>
+              <a:t>RATCHET · PART 1/5</a:t>
             </a:r>
           </a:p>
           <a:p/>
@@ -4253,7 +4297,7 @@
                 </a:solidFill>
                 <a:latin typeface="Consolas"/>
               </a:rPr>
-              <a:t>RATCHET · PART 1/4</a:t>
+              <a:t>RATCHET · PART 1/5</a:t>
             </a:r>
           </a:p>
           <a:p/>
@@ -4691,7 +4735,7 @@
                 </a:solidFill>
                 <a:latin typeface="Consolas"/>
               </a:rPr>
-              <a:t>RATCHET · PART 1/4</a:t>
+              <a:t>RATCHET · PART 1/5</a:t>
             </a:r>
           </a:p>
           <a:p/>
@@ -5000,7 +5044,7 @@
                 </a:solidFill>
                 <a:latin typeface="Consolas"/>
               </a:rPr>
-              <a:t>RATCHET · PART 1/4</a:t>
+              <a:t>RATCHET · PART 1/5</a:t>
             </a:r>
           </a:p>
           <a:p/>
@@ -5447,7 +5491,7 @@
                 </a:solidFill>
                 <a:latin typeface="Consolas"/>
               </a:rPr>
-              <a:t>RATCHET · PART 1/4</a:t>
+              <a:t>RATCHET · PART 1/5</a:t>
             </a:r>
           </a:p>
           <a:p/>
@@ -5857,7 +5901,7 @@
                 </a:solidFill>
                 <a:latin typeface="Consolas"/>
               </a:rPr>
-              <a:t>RATCHET · PART 1/4</a:t>
+              <a:t>RATCHET · PART 1/5</a:t>
             </a:r>
           </a:p>
           <a:p/>
@@ -6249,7 +6293,7 @@
                 </a:solidFill>
                 <a:latin typeface="Consolas"/>
               </a:rPr>
-              <a:t>RATCHET · PART 1/4</a:t>
+              <a:t>RATCHET · PART 1/5</a:t>
             </a:r>
           </a:p>
           <a:p/>
@@ -6716,7 +6760,7 @@
                 </a:solidFill>
                 <a:latin typeface="Consolas"/>
               </a:rPr>
-              <a:t>RATCHET · PART 1/4</a:t>
+              <a:t>RATCHET · PART 1/5</a:t>
             </a:r>
           </a:p>
           <a:p/>
@@ -7038,7 +7082,7 @@
                 </a:solidFill>
                 <a:latin typeface="Consolas"/>
               </a:rPr>
-              <a:t>RATCHET · PART 1/4</a:t>
+              <a:t>RATCHET · PART 1/5</a:t>
             </a:r>
           </a:p>
         </p:txBody>
@@ -7385,7 +7429,7 @@
                 </a:solidFill>
                 <a:latin typeface="Consolas"/>
               </a:rPr>
-              <a:t>RATCHET · PART 1/4</a:t>
+              <a:t>RATCHET · PART 1/5</a:t>
             </a:r>
           </a:p>
           <a:p/>
@@ -7832,7 +7876,7 @@
                 </a:solidFill>
                 <a:latin typeface="Consolas"/>
               </a:rPr>
-              <a:t>RATCHET · PART 1/4</a:t>
+              <a:t>RATCHET · PART 1/5</a:t>
             </a:r>
           </a:p>
           <a:p/>
@@ -8141,7 +8185,7 @@
                 </a:solidFill>
                 <a:latin typeface="Consolas"/>
               </a:rPr>
-              <a:t>RATCHET · PART 1/4</a:t>
+              <a:t>RATCHET · PART 1/5</a:t>
             </a:r>
           </a:p>
           <a:p/>
@@ -8588,7 +8632,7 @@
                 </a:solidFill>
                 <a:latin typeface="Consolas"/>
               </a:rPr>
-              <a:t>RATCHET · PART 1/4</a:t>
+              <a:t>RATCHET · PART 1/5</a:t>
             </a:r>
           </a:p>
           <a:p/>
@@ -9035,7 +9079,7 @@
                 </a:solidFill>
                 <a:latin typeface="Consolas"/>
               </a:rPr>
-              <a:t>RATCHET · PART 1/4</a:t>
+              <a:t>RATCHET · PART 1/5</a:t>
             </a:r>
           </a:p>
           <a:p/>
@@ -9344,7 +9388,7 @@
                 </a:solidFill>
                 <a:latin typeface="Consolas"/>
               </a:rPr>
-              <a:t>RATCHET · PART 1/4</a:t>
+              <a:t>RATCHET · PART 1/5</a:t>
             </a:r>
           </a:p>
           <a:p/>
@@ -9828,7 +9872,7 @@
                 </a:solidFill>
                 <a:latin typeface="Consolas"/>
               </a:rPr>
-              <a:t>RATCHET · PART 1/4</a:t>
+              <a:t>RATCHET · PART 1/5</a:t>
             </a:r>
           </a:p>
           <a:p/>
@@ -10238,7 +10282,7 @@
                 </a:solidFill>
                 <a:latin typeface="Consolas"/>
               </a:rPr>
-              <a:t>RATCHET · PART 1/4</a:t>
+              <a:t>RATCHET · PART 1/5</a:t>
             </a:r>
           </a:p>
           <a:p/>

--- a/writing/decks/01-ratchet.pptx
+++ b/writing/decks/01-ratchet.pptx
@@ -3178,7 +3178,7 @@
                 </a:solidFill>
                 <a:latin typeface="Consolas"/>
               </a:rPr>
-              <a:t>RATCHET · PART 1 OF 5</a:t>
+              <a:t>RATCHET · PART 1 OF 6</a:t>
             </a:r>
           </a:p>
         </p:txBody>
@@ -3290,7 +3290,7 @@
                 </a:solidFill>
                 <a:latin typeface="Calibri"/>
               </a:rPr>
-              <a:t>Part 1 of 5 — the light, orienting piece. Four deep dives follow: the architecture and model fleet, the wire-level mechanics of talking to it over Ollama, the craft of writing specs precise enough for small models, and a full account of the recent burn-in.</a:t>
+              <a:t>Part 1 of 6 — the light, orienting piece. Five deep dives follow: the architecture and model fleet, the wire-level mechanics of talking to it over Ollama, the craft of writing specs precise enough for small models, the workflow that turns prose into one of those specs, and a full account of the recent burn-in.</a:t>
             </a:r>
           </a:p>
         </p:txBody>
@@ -3480,6 +3480,50 @@
         <p:spPr>
           <a:xfrm>
             <a:off x="2148839" y="6263640"/>
+            <a:ext cx="146304" cy="146304"/>
+          </a:xfrm>
+          <a:prstGeom prst="ellipse">
+            <a:avLst/>
+          </a:prstGeom>
+          <a:solidFill>
+            <a:srgbClr val="3A3E44"/>
+          </a:solidFill>
+          <a:ln>
+            <a:noFill/>
+          </a:ln>
+          <a:effectLst/>
+        </p:spPr>
+        <p:style>
+          <a:lnRef idx="1">
+            <a:schemeClr val="accent1"/>
+          </a:lnRef>
+          <a:fillRef idx="3">
+            <a:schemeClr val="accent1"/>
+          </a:fillRef>
+          <a:effectRef idx="2">
+            <a:schemeClr val="accent1"/>
+          </a:effectRef>
+          <a:fontRef idx="minor">
+            <a:schemeClr val="lt1"/>
+          </a:fontRef>
+        </p:style>
+        <p:txBody>
+          <a:bodyPr rtlCol="0" anchor="ctr"/>
+          <a:lstStyle/>
+          <a:p>
+            <a:pPr algn="ctr"/>
+          </a:p>
+        </p:txBody>
+      </p:sp>
+      <p:sp>
+        <p:nvSpPr>
+          <p:cNvPr id="12" name="Oval 11"/>
+          <p:cNvSpPr/>
+          <p:nvPr/>
+        </p:nvSpPr>
+        <p:spPr>
+          <a:xfrm>
+            <a:off x="2468880" y="6263640"/>
             <a:ext cx="146304" cy="146304"/>
           </a:xfrm>
           <a:prstGeom prst="ellipse">
@@ -3877,7 +3921,7 @@
                 </a:solidFill>
                 <a:latin typeface="Consolas"/>
               </a:rPr>
-              <a:t>RATCHET · PART 1/5</a:t>
+              <a:t>RATCHET · PART 1/6</a:t>
             </a:r>
           </a:p>
           <a:p/>
@@ -4297,7 +4341,7 @@
                 </a:solidFill>
                 <a:latin typeface="Consolas"/>
               </a:rPr>
-              <a:t>RATCHET · PART 1/5</a:t>
+              <a:t>RATCHET · PART 1/6</a:t>
             </a:r>
           </a:p>
           <a:p/>
@@ -4735,7 +4779,7 @@
                 </a:solidFill>
                 <a:latin typeface="Consolas"/>
               </a:rPr>
-              <a:t>RATCHET · PART 1/5</a:t>
+              <a:t>RATCHET · PART 1/6</a:t>
             </a:r>
           </a:p>
           <a:p/>
@@ -5044,7 +5088,7 @@
                 </a:solidFill>
                 <a:latin typeface="Consolas"/>
               </a:rPr>
-              <a:t>RATCHET · PART 1/5</a:t>
+              <a:t>RATCHET · PART 1/6</a:t>
             </a:r>
           </a:p>
           <a:p/>
@@ -5491,7 +5535,7 @@
                 </a:solidFill>
                 <a:latin typeface="Consolas"/>
               </a:rPr>
-              <a:t>RATCHET · PART 1/5</a:t>
+              <a:t>RATCHET · PART 1/6</a:t>
             </a:r>
           </a:p>
           <a:p/>
@@ -5901,7 +5945,7 @@
                 </a:solidFill>
                 <a:latin typeface="Consolas"/>
               </a:rPr>
-              <a:t>RATCHET · PART 1/5</a:t>
+              <a:t>RATCHET · PART 1/6</a:t>
             </a:r>
           </a:p>
           <a:p/>
@@ -6293,7 +6337,7 @@
                 </a:solidFill>
                 <a:latin typeface="Consolas"/>
               </a:rPr>
-              <a:t>RATCHET · PART 1/5</a:t>
+              <a:t>RATCHET · PART 1/6</a:t>
             </a:r>
           </a:p>
           <a:p/>
@@ -6760,7 +6804,7 @@
                 </a:solidFill>
                 <a:latin typeface="Consolas"/>
               </a:rPr>
-              <a:t>RATCHET · PART 1/5</a:t>
+              <a:t>RATCHET · PART 1/6</a:t>
             </a:r>
           </a:p>
           <a:p/>
@@ -7082,7 +7126,7 @@
                 </a:solidFill>
                 <a:latin typeface="Consolas"/>
               </a:rPr>
-              <a:t>RATCHET · PART 1/5</a:t>
+              <a:t>RATCHET · PART 1/6</a:t>
             </a:r>
           </a:p>
         </p:txBody>
@@ -7429,7 +7473,7 @@
                 </a:solidFill>
                 <a:latin typeface="Consolas"/>
               </a:rPr>
-              <a:t>RATCHET · PART 1/5</a:t>
+              <a:t>RATCHET · PART 1/6</a:t>
             </a:r>
           </a:p>
           <a:p/>
@@ -7876,7 +7920,7 @@
                 </a:solidFill>
                 <a:latin typeface="Consolas"/>
               </a:rPr>
-              <a:t>RATCHET · PART 1/5</a:t>
+              <a:t>RATCHET · PART 1/6</a:t>
             </a:r>
           </a:p>
           <a:p/>
@@ -8185,7 +8229,7 @@
                 </a:solidFill>
                 <a:latin typeface="Consolas"/>
               </a:rPr>
-              <a:t>RATCHET · PART 1/5</a:t>
+              <a:t>RATCHET · PART 1/6</a:t>
             </a:r>
           </a:p>
           <a:p/>
@@ -8632,7 +8676,7 @@
                 </a:solidFill>
                 <a:latin typeface="Consolas"/>
               </a:rPr>
-              <a:t>RATCHET · PART 1/5</a:t>
+              <a:t>RATCHET · PART 1/6</a:t>
             </a:r>
           </a:p>
           <a:p/>
@@ -9079,7 +9123,7 @@
                 </a:solidFill>
                 <a:latin typeface="Consolas"/>
               </a:rPr>
-              <a:t>RATCHET · PART 1/5</a:t>
+              <a:t>RATCHET · PART 1/6</a:t>
             </a:r>
           </a:p>
           <a:p/>
@@ -9388,7 +9432,7 @@
                 </a:solidFill>
                 <a:latin typeface="Consolas"/>
               </a:rPr>
-              <a:t>RATCHET · PART 1/5</a:t>
+              <a:t>RATCHET · PART 1/6</a:t>
             </a:r>
           </a:p>
           <a:p/>
@@ -9872,7 +9916,7 @@
                 </a:solidFill>
                 <a:latin typeface="Consolas"/>
               </a:rPr>
-              <a:t>RATCHET · PART 1/5</a:t>
+              <a:t>RATCHET · PART 1/6</a:t>
             </a:r>
           </a:p>
           <a:p/>
@@ -10282,7 +10326,7 @@
                 </a:solidFill>
                 <a:latin typeface="Consolas"/>
               </a:rPr>
-              <a:t>RATCHET · PART 1/5</a:t>
+              <a:t>RATCHET · PART 1/6</a:t>
             </a:r>
           </a:p>
           <a:p/>

--- a/writing/decks/01-ratchet.pptx
+++ b/writing/decks/01-ratchet.pptx
@@ -7750,7 +7750,7 @@
               </a:spcAft>
             </a:pPr>
             <a:r>
-              <a:rPr sz="1700" b="1" i="0">
+              <a:rPr sz="1600" b="1" i="0">
                 <a:solidFill>
                   <a:srgbClr val="3D6D7E"/>
                 </a:solidFill>
@@ -7759,22 +7759,22 @@
               <a:t>—  </a:t>
             </a:r>
             <a:r>
-              <a:rPr sz="1700" b="1" i="0">
+              <a:rPr sz="1600" b="1" i="0">
                 <a:solidFill>
                   <a:srgbClr val="1C1E22"/>
                 </a:solidFill>
                 <a:latin typeface="Calibri"/>
               </a:rPr>
-              <a:t>Ambiguity gets guessed at. </a:t>
-            </a:r>
-            <a:r>
-              <a:rPr sz="1700" b="0" i="0">
+              <a:t>Ambiguity gets guessed at, inconsistently. </a:t>
+            </a:r>
+            <a:r>
+              <a:rPr sz="1600" b="0" i="0">
                 <a:solidFill>
                   <a:srgbClr val="1C1E22"/>
                 </a:solidFill>
                 <a:latin typeface="Calibri"/>
               </a:rPr>
-              <a:t>"Trim trailing whitespace" gets a mix of inconsistent interpretations across a hundred functions, silently.</a:t>
+              <a:t>A VM's AST nodes were spec'd as plain value literals, forcing no choice on pointer-vs-value. One bead's test and its own implementation picked opposite constructions of the identical type; days later, an unrelated bead reproduced the identical defect independently.</a:t>
             </a:r>
           </a:p>
           <a:p>
@@ -7787,7 +7787,7 @@
               </a:spcAft>
             </a:pPr>
             <a:r>
-              <a:rPr sz="1700" b="1" i="0">
+              <a:rPr sz="1600" b="1" i="0">
                 <a:solidFill>
                   <a:srgbClr val="3D6D7E"/>
                 </a:solidFill>
@@ -7796,22 +7796,22 @@
               <a:t>—  </a:t>
             </a:r>
             <a:r>
-              <a:rPr sz="1700" b="1" i="0">
+              <a:rPr sz="1600" b="1" i="0">
                 <a:solidFill>
                   <a:srgbClr val="1C1E22"/>
                 </a:solidFill>
                 <a:latin typeface="Calibri"/>
               </a:rPr>
-              <a:t>Structured output fights reasoning. </a:t>
-            </a:r>
-            <a:r>
-              <a:rPr sz="1700" b="0" i="0">
+              <a:t>Structured output fights reasoning — structurally, not by accident. </a:t>
+            </a:r>
+            <a:r>
+              <a:rPr sz="1600" b="0" i="0">
                 <a:solidFill>
                   <a:srgbClr val="1C1E22"/>
                 </a:solidFill>
                 <a:latin typeface="Calibri"/>
               </a:rPr>
-              <a:t>One core model never once emitted a tool call under a JSON-format constraint — 0 of 139 recorded calls. A structural conflict, not a prompting bug.</a:t>
+              <a:t>qwen3:32b's template writes a tool call as literal &lt;tool_call&gt; text inside the exact channel a JSON-format grammar constrains — "&lt;" isn't legal JSON. Zero tool calls got through, out of 139 recorded attempts.</a:t>
             </a:r>
           </a:p>
           <a:p>
@@ -7824,7 +7824,7 @@
               </a:spcAft>
             </a:pPr>
             <a:r>
-              <a:rPr sz="1700" b="1" i="0">
+              <a:rPr sz="1600" b="1" i="0">
                 <a:solidFill>
                   <a:srgbClr val="3D6D7E"/>
                 </a:solidFill>
@@ -7833,22 +7833,22 @@
               <a:t>—  </a:t>
             </a:r>
             <a:r>
-              <a:rPr sz="1700" b="1" i="0">
+              <a:rPr sz="1600" b="1" i="0">
                 <a:solidFill>
                   <a:srgbClr val="1C1E22"/>
                 </a:solidFill>
                 <a:latin typeface="Calibri"/>
               </a:rPr>
-              <a:t>They get stuck. </a:t>
-            </a:r>
-            <a:r>
-              <a:rPr sz="1700" b="0" i="0">
+              <a:t>They get stuck, past where a frontier model would stop. </a:t>
+            </a:r>
+            <a:r>
+              <a:rPr sz="1600" b="0" i="0">
                 <a:solidFill>
                   <a:srgbClr val="1C1E22"/>
                 </a:solidFill>
                 <a:latin typeface="Calibri"/>
               </a:rPr>
-              <a:t>Looping on the same failed compile error, or burning the whole response budget "thinking" without ever answering.</a:t>
+              <a:t>One reasoning stream climbed past 14,500 tokens and kept climbing, burning its whole turn budget before producing an answer — there was no per-turn cap yet to catch it.</a:t>
             </a:r>
           </a:p>
           <a:p>
@@ -7861,7 +7861,7 @@
               </a:spcAft>
             </a:pPr>
             <a:r>
-              <a:rPr sz="1700" b="1" i="0">
+              <a:rPr sz="1600" b="1" i="0">
                 <a:solidFill>
                   <a:srgbClr val="3D6D7E"/>
                 </a:solidFill>
@@ -7870,22 +7870,22 @@
               <a:t>—  </a:t>
             </a:r>
             <a:r>
-              <a:rPr sz="1700" b="1" i="0">
+              <a:rPr sz="1600" b="1" i="0">
                 <a:solidFill>
                   <a:srgbClr val="1C1E22"/>
                 </a:solidFill>
                 <a:latin typeface="Calibri"/>
               </a:rPr>
-              <a:t>They lie about success — unknowingly. </a:t>
-            </a:r>
-            <a:r>
-              <a:rPr sz="1700" b="0" i="0">
+              <a:t>They report success without knowing better. </a:t>
+            </a:r>
+            <a:r>
+              <a:rPr sz="1600" b="0" i="0">
                 <a:solidFill>
                   <a:srgbClr val="1C1E22"/>
                 </a:solidFill>
                 <a:latin typeface="Calibri"/>
               </a:rPr>
-              <a:t>A model that writes a file has no way to confirm it landed on disk with the right bytes. It has to be checked.</a:t>
+              <a:t>A spec-revision step once handed back a response that stopped mid-token, its pinned literals sheared off the end — a completely normal "done" status attached to output nobody had checked the length of.</a:t>
             </a:r>
           </a:p>
         </p:txBody>
